--- a/03-资源/PPT/毛泽东思想和中国特色社会主义理论体系概论 教学大纲概览.pptx
+++ b/03-资源/PPT/毛泽东思想和中国特色社会主义理论体系概论 教学大纲概览.pptx
@@ -8513,7 +8513,7 @@
                 <a:cs typeface="思源黑体"/>
                 <a:ascii typeface="思源黑体"/>
               </a:rPr>
-              <a:t>· 所属部分：第二部分</a:t>
+              <a:t>所属部分：第二部分    ·    学时：4</a:t>
             </a:r>
           </a:p>
           <a:p>
@@ -8532,26 +8532,7 @@
                 <a:cs typeface="思源黑体"/>
                 <a:ascii typeface="思源黑体"/>
               </a:rPr>
-              <a:t>· 学时：4 学时</a:t>
-            </a:r>
-          </a:p>
-          <a:p>
-            <a:pPr algn="l">
-              <a:lnSpc>
-                <a:spcPct val="150000"/>
-              </a:lnSpc>
-            </a:pPr>
-            <a:r>
-              <a:rPr sz="1100" b="0">
-                <a:solidFill>
-                  <a:srgbClr val="2C2C2C"/>
-                </a:solidFill>
-                <a:latin typeface="思源黑体"/>
-                <a:eastAsia typeface="思源黑体"/>
-                <a:cs typeface="思源黑体"/>
-                <a:ascii typeface="思源黑体"/>
-              </a:rPr>
-              <a:t>· 主题定位：第一次飞跃 · 毛泽东思想总论</a:t>
+              <a:t>主题定位：第一次飞跃 · 毛泽东思想总论</a:t>
             </a:r>
           </a:p>
         </p:txBody>
@@ -8868,37 +8849,6 @@
                 <a:ascii typeface="思源黑体"/>
               </a:rPr>
               <a:t>活的灵魂——实事求是 / 群众路线 / 独立自主 三个基本方面</a:t>
-            </a:r>
-          </a:p>
-          <a:p>
-            <a:pPr algn="l">
-              <a:lnSpc>
-                <a:spcPct val="160000"/>
-              </a:lnSpc>
-            </a:pPr>
-            <a:r>
-              <a:rPr sz="1100" b="1">
-                <a:solidFill>
-                  <a:srgbClr val="8B2C2C"/>
-                </a:solidFill>
-                <a:latin typeface="思源黑体"/>
-                <a:eastAsia typeface="思源黑体"/>
-                <a:cs typeface="思源黑体"/>
-                <a:ascii typeface="思源黑体"/>
-              </a:rPr>
-              <a:t>❓ </a:t>
-            </a:r>
-            <a:r>
-              <a:rPr sz="1100" b="0">
-                <a:solidFill>
-                  <a:srgbClr val="2C2C2C"/>
-                </a:solidFill>
-                <a:latin typeface="思源黑体"/>
-                <a:eastAsia typeface="思源黑体"/>
-                <a:cs typeface="思源黑体"/>
-                <a:ascii typeface="思源黑体"/>
-              </a:rPr>
-              <a:t>形成过程——萌芽（1921-土地革命）→ 形成（遵义-抗战）→ 成熟（延安）→ 继续发展（建国后）</a:t>
             </a:r>
           </a:p>
         </p:txBody>
@@ -12190,7 +12140,7 @@
                 <a:cs typeface="思源黑体"/>
                 <a:ascii typeface="思源黑体"/>
               </a:rPr>
-              <a:t>· 所属部分：第二部分</a:t>
+              <a:t>所属部分：第二部分    ·    学时：4</a:t>
             </a:r>
           </a:p>
           <a:p>
@@ -12209,26 +12159,7 @@
                 <a:cs typeface="思源黑体"/>
                 <a:ascii typeface="思源黑体"/>
               </a:rPr>
-              <a:t>· 学时：4 学时</a:t>
-            </a:r>
-          </a:p>
-          <a:p>
-            <a:pPr algn="l">
-              <a:lnSpc>
-                <a:spcPct val="150000"/>
-              </a:lnSpc>
-            </a:pPr>
-            <a:r>
-              <a:rPr sz="1100" b="0">
-                <a:solidFill>
-                  <a:srgbClr val="2C2C2C"/>
-                </a:solidFill>
-                <a:latin typeface="思源黑体"/>
-                <a:eastAsia typeface="思源黑体"/>
-                <a:cs typeface="思源黑体"/>
-                <a:ascii typeface="思源黑体"/>
-              </a:rPr>
-              <a:t>· 主题定位：中国革命道路的独特解</a:t>
+              <a:t>主题定位：中国革命道路的独特解</a:t>
             </a:r>
           </a:p>
         </p:txBody>
@@ -12545,37 +12476,6 @@
                 <a:ascii typeface="思源黑体"/>
               </a:rPr>
               <a:t>新民主主义革命——无产阶级领导的，人民大众的，反对帝国主义、封建主义和官僚资本主义的革命</a:t>
-            </a:r>
-          </a:p>
-          <a:p>
-            <a:pPr algn="l">
-              <a:lnSpc>
-                <a:spcPct val="160000"/>
-              </a:lnSpc>
-            </a:pPr>
-            <a:r>
-              <a:rPr sz="1100" b="1">
-                <a:solidFill>
-                  <a:srgbClr val="8B2C2C"/>
-                </a:solidFill>
-                <a:latin typeface="思源黑体"/>
-                <a:eastAsia typeface="思源黑体"/>
-                <a:cs typeface="思源黑体"/>
-                <a:ascii typeface="思源黑体"/>
-              </a:rPr>
-              <a:t>❓ </a:t>
-            </a:r>
-            <a:r>
-              <a:rPr sz="1100" b="0">
-                <a:solidFill>
-                  <a:srgbClr val="2C2C2C"/>
-                </a:solidFill>
-                <a:latin typeface="思源黑体"/>
-                <a:eastAsia typeface="思源黑体"/>
-                <a:cs typeface="思源黑体"/>
-                <a:ascii typeface="思源黑体"/>
-              </a:rPr>
-              <a:t>革命道路——农村包围城市、武装夺取政权</a:t>
             </a:r>
           </a:p>
         </p:txBody>
@@ -15867,7 +15767,7 @@
                 <a:cs typeface="思源黑体"/>
                 <a:ascii typeface="思源黑体"/>
               </a:rPr>
-              <a:t>· 所属部分：第二部分</a:t>
+              <a:t>所属部分：第二部分    ·    学时：4</a:t>
             </a:r>
           </a:p>
           <a:p>
@@ -15886,26 +15786,7 @@
                 <a:cs typeface="思源黑体"/>
                 <a:ascii typeface="思源黑体"/>
               </a:rPr>
-              <a:t>· 学时：4 学时</a:t>
-            </a:r>
-          </a:p>
-          <a:p>
-            <a:pPr algn="l">
-              <a:lnSpc>
-                <a:spcPct val="150000"/>
-              </a:lnSpc>
-            </a:pPr>
-            <a:r>
-              <a:rPr sz="1100" b="0">
-                <a:solidFill>
-                  <a:srgbClr val="2C2C2C"/>
-                </a:solidFill>
-                <a:latin typeface="思源黑体"/>
-                <a:eastAsia typeface="思源黑体"/>
-                <a:cs typeface="思源黑体"/>
-                <a:ascii typeface="思源黑体"/>
-              </a:rPr>
-              <a:t>· 主题定位：从新民主主义到社会主义</a:t>
+              <a:t>主题定位：从新民主主义到社会主义</a:t>
             </a:r>
           </a:p>
         </p:txBody>
@@ -16222,37 +16103,6 @@
                 <a:ascii typeface="思源黑体"/>
               </a:rPr>
               <a:t>过渡时期总路线——「一化三改」：社会主义工业化 + 农业/手工业/资本主义工商业改造</a:t>
-            </a:r>
-          </a:p>
-          <a:p>
-            <a:pPr algn="l">
-              <a:lnSpc>
-                <a:spcPct val="160000"/>
-              </a:lnSpc>
-            </a:pPr>
-            <a:r>
-              <a:rPr sz="1100" b="1">
-                <a:solidFill>
-                  <a:srgbClr val="8B2C2C"/>
-                </a:solidFill>
-                <a:latin typeface="思源黑体"/>
-                <a:eastAsia typeface="思源黑体"/>
-                <a:cs typeface="思源黑体"/>
-                <a:ascii typeface="思源黑体"/>
-              </a:rPr>
-              <a:t>❓ </a:t>
-            </a:r>
-            <a:r>
-              <a:rPr sz="1100" b="0">
-                <a:solidFill>
-                  <a:srgbClr val="2C2C2C"/>
-                </a:solidFill>
-                <a:latin typeface="思源黑体"/>
-                <a:eastAsia typeface="思源黑体"/>
-                <a:cs typeface="思源黑体"/>
-                <a:ascii typeface="思源黑体"/>
-              </a:rPr>
-              <a:t>和平赎买——对民族资本不没收，而以赎买、定息等方式逐步过渡</a:t>
             </a:r>
           </a:p>
         </p:txBody>
@@ -19664,7 +19514,7 @@
                 <a:cs typeface="思源黑体"/>
                 <a:ascii typeface="思源黑体"/>
               </a:rPr>
-              <a:t>系统掌握马克思主义中国化时代化的科学内涵</a:t>
+              <a:t>系统掌握中国化时代化科学内涵 + 4 个自信</a:t>
             </a:r>
           </a:p>
           <a:p>
@@ -19695,7 +19545,7 @@
                 <a:cs typeface="思源黑体"/>
                 <a:ascii typeface="思源黑体"/>
               </a:rPr>
-              <a:t>理解各理论成果一脉相承又与时俱进的内在关系</a:t>
+              <a:t>理解理论成果一脉相承又与时俱进的内在关系</a:t>
             </a:r>
           </a:p>
           <a:p>
@@ -19727,68 +19577,6 @@
                 <a:ascii typeface="思源黑体"/>
               </a:rPr>
               <a:t>运用马克思主义立场观点方法分析中国现实问题</a:t>
-            </a:r>
-          </a:p>
-          <a:p>
-            <a:pPr algn="l">
-              <a:lnSpc>
-                <a:spcPct val="150000"/>
-              </a:lnSpc>
-            </a:pPr>
-            <a:r>
-              <a:rPr sz="1200" b="1">
-                <a:solidFill>
-                  <a:srgbClr val="8B2C2C"/>
-                </a:solidFill>
-                <a:latin typeface="思源黑体"/>
-                <a:eastAsia typeface="思源黑体"/>
-                <a:cs typeface="思源黑体"/>
-                <a:ascii typeface="思源黑体"/>
-              </a:rPr>
-              <a:t>■  </a:t>
-            </a:r>
-            <a:r>
-              <a:rPr sz="1200" b="0">
-                <a:solidFill>
-                  <a:srgbClr val="2C2C2C"/>
-                </a:solidFill>
-                <a:latin typeface="思源黑体"/>
-                <a:eastAsia typeface="思源黑体"/>
-                <a:cs typeface="思源黑体"/>
-                <a:ascii typeface="思源黑体"/>
-              </a:rPr>
-              <a:t>确立科学社会主义信仰和建设中国特色社会主义共同理想</a:t>
-            </a:r>
-          </a:p>
-          <a:p>
-            <a:pPr algn="l">
-              <a:lnSpc>
-                <a:spcPct val="150000"/>
-              </a:lnSpc>
-            </a:pPr>
-            <a:r>
-              <a:rPr sz="1200" b="1">
-                <a:solidFill>
-                  <a:srgbClr val="8B2C2C"/>
-                </a:solidFill>
-                <a:latin typeface="思源黑体"/>
-                <a:eastAsia typeface="思源黑体"/>
-                <a:cs typeface="思源黑体"/>
-                <a:ascii typeface="思源黑体"/>
-              </a:rPr>
-              <a:t>■  </a:t>
-            </a:r>
-            <a:r>
-              <a:rPr sz="1200" b="0">
-                <a:solidFill>
-                  <a:srgbClr val="2C2C2C"/>
-                </a:solidFill>
-                <a:latin typeface="思源黑体"/>
-                <a:eastAsia typeface="思源黑体"/>
-                <a:cs typeface="思源黑体"/>
-                <a:ascii typeface="思源黑体"/>
-              </a:rPr>
-              <a:t>增强四个自信，为实现中华民族伟大复兴而奋斗</a:t>
             </a:r>
           </a:p>
         </p:txBody>
@@ -19884,7 +19672,7 @@
                 <a:cs typeface="思源黑体"/>
                 <a:ascii typeface="思源黑体"/>
               </a:rPr>
-              <a:t>课前：观看视频、阅读资料、预习教材</a:t>
+              <a:t>课前：视频 / 资料 / 预习（知识）</a:t>
             </a:r>
           </a:p>
           <a:p>
@@ -19915,7 +19703,7 @@
                 <a:cs typeface="思源黑体"/>
                 <a:ascii typeface="思源黑体"/>
               </a:rPr>
-              <a:t>课内：课堂讲授、案例教学、专题研讨、师生对话</a:t>
+              <a:t>课内：讲授 / 案例 / 研讨（能力）</a:t>
             </a:r>
           </a:p>
           <a:p>
@@ -19946,7 +19734,7 @@
                 <a:cs typeface="思源黑体"/>
                 <a:ascii typeface="思源黑体"/>
               </a:rPr>
-              <a:t>课后：社会调研、主题实践、完成作业</a:t>
+              <a:t>课后：调研 / 实践 / 作业（素养）</a:t>
             </a:r>
           </a:p>
         </p:txBody>
@@ -20546,7 +20334,7 @@
                 <a:cs typeface="思源黑体"/>
                 <a:ascii typeface="思源黑体"/>
               </a:rPr>
-              <a:t>· 所属部分：第二部分</a:t>
+              <a:t>所属部分：第二部分    ·    学时：3</a:t>
             </a:r>
           </a:p>
           <a:p>
@@ -20565,26 +20353,7 @@
                 <a:cs typeface="思源黑体"/>
                 <a:ascii typeface="思源黑体"/>
               </a:rPr>
-              <a:t>· 学时：3 学时</a:t>
-            </a:r>
-          </a:p>
-          <a:p>
-            <a:pPr algn="l">
-              <a:lnSpc>
-                <a:spcPct val="150000"/>
-              </a:lnSpc>
-            </a:pPr>
-            <a:r>
-              <a:rPr sz="1100" b="0">
-                <a:solidFill>
-                  <a:srgbClr val="2C2C2C"/>
-                </a:solidFill>
-                <a:latin typeface="思源黑体"/>
-                <a:eastAsia typeface="思源黑体"/>
-                <a:cs typeface="思源黑体"/>
-                <a:ascii typeface="思源黑体"/>
-              </a:rPr>
-              <a:t>· 主题定位：成就与曲折并存的探索</a:t>
+              <a:t>主题定位：成就与曲折并存的探索</a:t>
             </a:r>
           </a:p>
         </p:txBody>
@@ -20901,37 +20670,6 @@
                 <a:ascii typeface="思源黑体"/>
               </a:rPr>
               <a:t>两类矛盾学说——敌我矛盾（对抗性）+ 人民内部矛盾（非对抗性）；处理方针：团结—批评—团结</a:t>
-            </a:r>
-          </a:p>
-          <a:p>
-            <a:pPr algn="l">
-              <a:lnSpc>
-                <a:spcPct val="160000"/>
-              </a:lnSpc>
-            </a:pPr>
-            <a:r>
-              <a:rPr sz="1100" b="1">
-                <a:solidFill>
-                  <a:srgbClr val="8B2C2C"/>
-                </a:solidFill>
-                <a:latin typeface="思源黑体"/>
-                <a:eastAsia typeface="思源黑体"/>
-                <a:cs typeface="思源黑体"/>
-                <a:ascii typeface="思源黑体"/>
-              </a:rPr>
-              <a:t>❓ </a:t>
-            </a:r>
-            <a:r>
-              <a:rPr sz="1100" b="0">
-                <a:solidFill>
-                  <a:srgbClr val="2C2C2C"/>
-                </a:solidFill>
-                <a:latin typeface="思源黑体"/>
-                <a:eastAsia typeface="思源黑体"/>
-                <a:cs typeface="思源黑体"/>
-                <a:ascii typeface="思源黑体"/>
-              </a:rPr>
-              <a:t>十大关系——1956 年《论十大关系》提出重工业轻工业农业协调等十组关系</a:t>
             </a:r>
           </a:p>
         </p:txBody>
@@ -24693,7 +24431,7 @@
                 <a:cs typeface="思源黑体"/>
                 <a:ascii typeface="思源黑体"/>
               </a:rPr>
-              <a:t>· 所属部分：第三部分</a:t>
+              <a:t>所属部分：第三部分    ·    学时：2</a:t>
             </a:r>
           </a:p>
           <a:p>
@@ -24712,26 +24450,7 @@
                 <a:cs typeface="思源黑体"/>
                 <a:ascii typeface="思源黑体"/>
               </a:rPr>
-              <a:t>· 学时：2 学时</a:t>
-            </a:r>
-          </a:p>
-          <a:p>
-            <a:pPr algn="l">
-              <a:lnSpc>
-                <a:spcPct val="150000"/>
-              </a:lnSpc>
-            </a:pPr>
-            <a:r>
-              <a:rPr sz="1100" b="0">
-                <a:solidFill>
-                  <a:srgbClr val="2C2C2C"/>
-                </a:solidFill>
-                <a:latin typeface="思源黑体"/>
-                <a:eastAsia typeface="思源黑体"/>
-                <a:cs typeface="思源黑体"/>
-                <a:ascii typeface="思源黑体"/>
-              </a:rPr>
-              <a:t>· 主题定位：第二次飞跃总论</a:t>
+              <a:t>主题定位：第二次飞跃总论</a:t>
             </a:r>
           </a:p>
         </p:txBody>
@@ -25017,37 +24736,6 @@
                 <a:ascii typeface="思源黑体"/>
               </a:rPr>
               <a:t>实践起点——1978 年真理标准大讨论 + 党的十一届三中全会</a:t>
-            </a:r>
-          </a:p>
-          <a:p>
-            <a:pPr algn="l">
-              <a:lnSpc>
-                <a:spcPct val="160000"/>
-              </a:lnSpc>
-            </a:pPr>
-            <a:r>
-              <a:rPr sz="1100" b="1">
-                <a:solidFill>
-                  <a:srgbClr val="8B2C2C"/>
-                </a:solidFill>
-                <a:latin typeface="思源黑体"/>
-                <a:eastAsia typeface="思源黑体"/>
-                <a:cs typeface="思源黑体"/>
-                <a:ascii typeface="思源黑体"/>
-              </a:rPr>
-              <a:t>❓ </a:t>
-            </a:r>
-            <a:r>
-              <a:rPr sz="1100" b="0">
-                <a:solidFill>
-                  <a:srgbClr val="2C2C2C"/>
-                </a:solidFill>
-                <a:latin typeface="思源黑体"/>
-                <a:eastAsia typeface="思源黑体"/>
-                <a:cs typeface="思源黑体"/>
-                <a:ascii typeface="思源黑体"/>
-              </a:rPr>
-              <a:t>理论体系——邓小平理论 + 三个代表 + 科学发展观 + 习近平新时代中国特色社会主义思想</a:t>
             </a:r>
           </a:p>
         </p:txBody>
@@ -25731,7 +25419,7 @@
                 <a:cs typeface="思源黑体"/>
                 <a:ascii typeface="思源黑体"/>
               </a:rPr>
-              <a:t>· 所属部分：第三部分</a:t>
+              <a:t>所属部分：第三部分    ·    学时：4</a:t>
             </a:r>
           </a:p>
           <a:p>
@@ -25750,26 +25438,7 @@
                 <a:cs typeface="思源黑体"/>
                 <a:ascii typeface="思源黑体"/>
               </a:rPr>
-              <a:t>· 学时：4 学时</a:t>
-            </a:r>
-          </a:p>
-          <a:p>
-            <a:pPr algn="l">
-              <a:lnSpc>
-                <a:spcPct val="150000"/>
-              </a:lnSpc>
-            </a:pPr>
-            <a:r>
-              <a:rPr sz="1100" b="0">
-                <a:solidFill>
-                  <a:srgbClr val="2C2C2C"/>
-                </a:solidFill>
-                <a:latin typeface="思源黑体"/>
-                <a:eastAsia typeface="思源黑体"/>
-                <a:cs typeface="思源黑体"/>
-                <a:ascii typeface="思源黑体"/>
-              </a:rPr>
-              <a:t>· 主题定位：开篇之作 · 回答「什么是社会主义」</a:t>
+              <a:t>主题定位：开篇之作 · 回答「什么是社会主义」</a:t>
             </a:r>
           </a:p>
         </p:txBody>
@@ -26086,37 +25755,6 @@
                 <a:ascii typeface="思源黑体"/>
               </a:rPr>
               <a:t>社会主义初级阶段——至少需要 100 年；基本路线：一个中心 + 两个基本点</a:t>
-            </a:r>
-          </a:p>
-          <a:p>
-            <a:pPr algn="l">
-              <a:lnSpc>
-                <a:spcPct val="160000"/>
-              </a:lnSpc>
-            </a:pPr>
-            <a:r>
-              <a:rPr sz="1100" b="1">
-                <a:solidFill>
-                  <a:srgbClr val="8B2C2C"/>
-                </a:solidFill>
-                <a:latin typeface="思源黑体"/>
-                <a:eastAsia typeface="思源黑体"/>
-                <a:cs typeface="思源黑体"/>
-                <a:ascii typeface="思源黑体"/>
-              </a:rPr>
-              <a:t>❓ </a:t>
-            </a:r>
-            <a:r>
-              <a:rPr sz="1100" b="0">
-                <a:solidFill>
-                  <a:srgbClr val="2C2C2C"/>
-                </a:solidFill>
-                <a:latin typeface="思源黑体"/>
-                <a:eastAsia typeface="思源黑体"/>
-                <a:cs typeface="思源黑体"/>
-                <a:ascii typeface="思源黑体"/>
-              </a:rPr>
-              <a:t>社会主义市场经济——计划和市场都是经济手段，不是社会主义与资本主义的本质区别</a:t>
             </a:r>
           </a:p>
         </p:txBody>
@@ -26800,7 +26438,7 @@
                 <a:cs typeface="思源黑体"/>
                 <a:ascii typeface="思源黑体"/>
               </a:rPr>
-              <a:t>· 所属部分：第三部分</a:t>
+              <a:t>所属部分：第三部分    ·    学时：2</a:t>
             </a:r>
           </a:p>
           <a:p>
@@ -26819,26 +26457,7 @@
                 <a:cs typeface="思源黑体"/>
                 <a:ascii typeface="思源黑体"/>
               </a:rPr>
-              <a:t>· 学时：2 学时</a:t>
-            </a:r>
-          </a:p>
-          <a:p>
-            <a:pPr algn="l">
-              <a:lnSpc>
-                <a:spcPct val="150000"/>
-              </a:lnSpc>
-            </a:pPr>
-            <a:r>
-              <a:rPr sz="1100" b="0">
-                <a:solidFill>
-                  <a:srgbClr val="2C2C2C"/>
-                </a:solidFill>
-                <a:latin typeface="思源黑体"/>
-                <a:eastAsia typeface="思源黑体"/>
-                <a:cs typeface="思源黑体"/>
-                <a:ascii typeface="思源黑体"/>
-              </a:rPr>
-              <a:t>· 主题定位：回答「建设什么样的党」</a:t>
+              <a:t>主题定位：回答「建设什么样的党」</a:t>
             </a:r>
           </a:p>
         </p:txBody>
@@ -27155,37 +26774,6 @@
                 <a:ascii typeface="思源黑体"/>
               </a:rPr>
               <a:t>先进生产力——不是某项技术，而是社会生产力整体中最活跃、最能带动全局的部分</a:t>
-            </a:r>
-          </a:p>
-          <a:p>
-            <a:pPr algn="l">
-              <a:lnSpc>
-                <a:spcPct val="160000"/>
-              </a:lnSpc>
-            </a:pPr>
-            <a:r>
-              <a:rPr sz="1100" b="1">
-                <a:solidFill>
-                  <a:srgbClr val="8B2C2C"/>
-                </a:solidFill>
-                <a:latin typeface="思源黑体"/>
-                <a:eastAsia typeface="思源黑体"/>
-                <a:cs typeface="思源黑体"/>
-                <a:ascii typeface="思源黑体"/>
-              </a:rPr>
-              <a:t>❓ </a:t>
-            </a:r>
-            <a:r>
-              <a:rPr sz="1100" b="0">
-                <a:solidFill>
-                  <a:srgbClr val="2C2C2C"/>
-                </a:solidFill>
-                <a:latin typeface="思源黑体"/>
-                <a:eastAsia typeface="思源黑体"/>
-                <a:cs typeface="思源黑体"/>
-                <a:ascii typeface="思源黑体"/>
-              </a:rPr>
-              <a:t>党建新纲领——把党的先进性放到「三个代表」统一体中考察</a:t>
             </a:r>
           </a:p>
         </p:txBody>
@@ -27869,7 +27457,7 @@
                 <a:cs typeface="思源黑体"/>
                 <a:ascii typeface="思源黑体"/>
               </a:rPr>
-              <a:t>· 所属部分：第三部分</a:t>
+              <a:t>所属部分：第三部分    ·    学时：2</a:t>
             </a:r>
           </a:p>
           <a:p>
@@ -27888,26 +27476,7 @@
                 <a:cs typeface="思源黑体"/>
                 <a:ascii typeface="思源黑体"/>
               </a:rPr>
-              <a:t>· 学时：2 学时</a:t>
-            </a:r>
-          </a:p>
-          <a:p>
-            <a:pPr algn="l">
-              <a:lnSpc>
-                <a:spcPct val="150000"/>
-              </a:lnSpc>
-            </a:pPr>
-            <a:r>
-              <a:rPr sz="1100" b="0">
-                <a:solidFill>
-                  <a:srgbClr val="2C2C2C"/>
-                </a:solidFill>
-                <a:latin typeface="思源黑体"/>
-                <a:eastAsia typeface="思源黑体"/>
-                <a:cs typeface="思源黑体"/>
-                <a:ascii typeface="思源黑体"/>
-              </a:rPr>
-              <a:t>· 主题定位：回答「实现什么样的发展」</a:t>
+              <a:t>主题定位：回答「实现什么样的发展」</a:t>
             </a:r>
           </a:p>
         </p:txBody>
@@ -28224,37 +27793,6 @@
                 <a:ascii typeface="思源黑体"/>
               </a:rPr>
               <a:t>核心——以人为本</a:t>
-            </a:r>
-          </a:p>
-          <a:p>
-            <a:pPr algn="l">
-              <a:lnSpc>
-                <a:spcPct val="160000"/>
-              </a:lnSpc>
-            </a:pPr>
-            <a:r>
-              <a:rPr sz="1100" b="1">
-                <a:solidFill>
-                  <a:srgbClr val="8B2C2C"/>
-                </a:solidFill>
-                <a:latin typeface="思源黑体"/>
-                <a:eastAsia typeface="思源黑体"/>
-                <a:cs typeface="思源黑体"/>
-                <a:ascii typeface="思源黑体"/>
-              </a:rPr>
-              <a:t>❓ </a:t>
-            </a:r>
-            <a:r>
-              <a:rPr sz="1100" b="0">
-                <a:solidFill>
-                  <a:srgbClr val="2C2C2C"/>
-                </a:solidFill>
-                <a:latin typeface="思源黑体"/>
-                <a:eastAsia typeface="思源黑体"/>
-                <a:cs typeface="思源黑体"/>
-                <a:ascii typeface="思源黑体"/>
-              </a:rPr>
-              <a:t>基本要求——全面协调可持续</a:t>
             </a:r>
           </a:p>
         </p:txBody>
@@ -31686,7 +31224,7 @@
                 <a:cs typeface="思源黑体"/>
                 <a:ascii typeface="思源黑体"/>
               </a:rPr>
-              <a:t>坚定四个自信（道路、理论、制度、文化）</a:t>
+              <a:t>坚定四个自信（道路 / 理论 / 制度 / 文化）</a:t>
             </a:r>
           </a:p>
           <a:p>
@@ -32009,7 +31547,7 @@
                 <a:cs typeface="思源黑体"/>
                 <a:ascii typeface="思源黑体"/>
               </a:rPr>
-              <a:t>课堂讲授 + 自主学习 + 视频学习（对应知识）</a:t>
+              <a:t>课堂讲授 + 视频学习（对应知识）</a:t>
             </a:r>
           </a:p>
           <a:p>
@@ -32040,7 +31578,7 @@
                 <a:cs typeface="思源黑体"/>
                 <a:ascii typeface="思源黑体"/>
               </a:rPr>
-              <a:t>小组研讨 + 案例分析 + 社会实践（对应能力）</a:t>
+              <a:t>小组研讨 + 案例分析 + 实践（对应能力）</a:t>
             </a:r>
           </a:p>
           <a:p>
@@ -32071,7 +31609,7 @@
                 <a:cs typeface="思源黑体"/>
                 <a:ascii typeface="思源黑体"/>
               </a:rPr>
-              <a:t>课堂互动 + 主题实践 + 考核反馈（对应素养）</a:t>
+              <a:t>课堂互动 + 考核反馈（对应素养）</a:t>
             </a:r>
           </a:p>
         </p:txBody>
@@ -38510,37 +38048,6 @@
               <a:t>重视实践与课堂参与</a:t>
             </a:r>
           </a:p>
-          <a:p>
-            <a:pPr algn="l">
-              <a:lnSpc>
-                <a:spcPct val="150000"/>
-              </a:lnSpc>
-            </a:pPr>
-            <a:r>
-              <a:rPr sz="1100" b="1">
-                <a:solidFill>
-                  <a:srgbClr val="8B2C2C"/>
-                </a:solidFill>
-                <a:latin typeface="思源黑体"/>
-                <a:eastAsia typeface="思源黑体"/>
-                <a:cs typeface="思源黑体"/>
-                <a:ascii typeface="思源黑体"/>
-              </a:rPr>
-              <a:t>·  </a:t>
-            </a:r>
-            <a:r>
-              <a:rPr sz="1100" b="0">
-                <a:solidFill>
-                  <a:srgbClr val="2C2C2C"/>
-                </a:solidFill>
-                <a:latin typeface="思源黑体"/>
-                <a:eastAsia typeface="思源黑体"/>
-                <a:cs typeface="思源黑体"/>
-                <a:ascii typeface="思源黑体"/>
-              </a:rPr>
-              <a:t>期末试卷难度适中、区分度合理</a:t>
-            </a:r>
-          </a:p>
         </p:txBody>
       </p:sp>
       <p:sp>
@@ -38634,7 +38141,7 @@
                 <a:cs typeface="思源黑体"/>
                 <a:ascii typeface="思源黑体"/>
               </a:rPr>
-              <a:t>主教材：本书编写组《毛概》2023 修订版（高教社）</a:t>
+              <a:t>主教材：本书编写组《毛概》2023 修订版</a:t>
             </a:r>
           </a:p>
           <a:p>
@@ -38665,38 +38172,7 @@
                 <a:cs typeface="思源黑体"/>
                 <a:ascii typeface="思源黑体"/>
               </a:rPr>
-              <a:t>原著：《毛选》《邓选》《江选》《胡选》《习谈治国理政》</a:t>
-            </a:r>
-          </a:p>
-          <a:p>
-            <a:pPr algn="l">
-              <a:lnSpc>
-                <a:spcPct val="150000"/>
-              </a:lnSpc>
-            </a:pPr>
-            <a:r>
-              <a:rPr sz="1000" b="1">
-                <a:solidFill>
-                  <a:srgbClr val="8B2C2C"/>
-                </a:solidFill>
-                <a:latin typeface="思源黑体"/>
-                <a:eastAsia typeface="思源黑体"/>
-                <a:cs typeface="思源黑体"/>
-                <a:ascii typeface="思源黑体"/>
-              </a:rPr>
-              <a:t>·  </a:t>
-            </a:r>
-            <a:r>
-              <a:rPr sz="1000" b="0">
-                <a:solidFill>
-                  <a:srgbClr val="2C2C2C"/>
-                </a:solidFill>
-                <a:latin typeface="思源黑体"/>
-                <a:eastAsia typeface="思源黑体"/>
-                <a:cs typeface="思源黑体"/>
-                <a:ascii typeface="思源黑体"/>
-              </a:rPr>
-              <a:t>辅助：《习近平著作选读》《中国共产党简史》</a:t>
+              <a:t>原著：《毛选》《邓选》《习谈治国理政》</a:t>
             </a:r>
           </a:p>
           <a:p>
@@ -45379,7 +44855,7 @@
                 <a:cs typeface="思源黑体"/>
                 <a:ascii typeface="思源黑体"/>
               </a:rPr>
-              <a:t>理解马克思主义中国化时代化的科学内涵</a:t>
+              <a:t>理解中国化时代化的科学内涵</a:t>
             </a:r>
           </a:p>
           <a:p>
@@ -45410,7 +44886,7 @@
                 <a:cs typeface="思源黑体"/>
                 <a:ascii typeface="思源黑体"/>
               </a:rPr>
-              <a:t>把握理论成果一脉相承又与时俱进的内在关系</a:t>
+              <a:t>把握一脉相承又与时俱进的内在关系</a:t>
             </a:r>
           </a:p>
           <a:p>
@@ -45441,7 +44917,7 @@
                 <a:cs typeface="思源黑体"/>
                 <a:ascii typeface="思源黑体"/>
               </a:rPr>
-              <a:t>明确学习本课程的方法和要求</a:t>
+              <a:t>明确学习本课程的方法</a:t>
             </a:r>
           </a:p>
         </p:txBody>
@@ -51551,7 +51027,7 @@
                 <a:cs typeface="思源黑体"/>
                 <a:ascii typeface="思源黑体"/>
               </a:rPr>
-              <a:t>· 所属部分：第一部分</a:t>
+              <a:t>所属部分：第一部分    ·    学时：2</a:t>
             </a:r>
           </a:p>
           <a:p>
@@ -51570,26 +51046,7 @@
                 <a:cs typeface="思源黑体"/>
                 <a:ascii typeface="思源黑体"/>
               </a:rPr>
-              <a:t>· 学时：2 学时</a:t>
-            </a:r>
-          </a:p>
-          <a:p>
-            <a:pPr algn="l">
-              <a:lnSpc>
-                <a:spcPct val="150000"/>
-              </a:lnSpc>
-            </a:pPr>
-            <a:r>
-              <a:rPr sz="1100" b="0">
-                <a:solidFill>
-                  <a:srgbClr val="2C2C2C"/>
-                </a:solidFill>
-                <a:latin typeface="思源黑体"/>
-                <a:eastAsia typeface="思源黑体"/>
-                <a:cs typeface="思源黑体"/>
-                <a:ascii typeface="思源黑体"/>
-              </a:rPr>
-              <a:t>· 主题定位：本课程导论 · 全课程总览</a:t>
+              <a:t>主题定位：本课程导论 · 全课程总览</a:t>
             </a:r>
           </a:p>
         </p:txBody>
@@ -51937,37 +51394,6 @@
                 <a:ascii typeface="思源黑体"/>
               </a:rPr>
               <a:t>两个结合——马克思主义基本原理同中国具体实际相结合、同中华优秀传统文化相结合</a:t>
-            </a:r>
-          </a:p>
-          <a:p>
-            <a:pPr algn="l">
-              <a:lnSpc>
-                <a:spcPct val="160000"/>
-              </a:lnSpc>
-            </a:pPr>
-            <a:r>
-              <a:rPr sz="1100" b="1">
-                <a:solidFill>
-                  <a:srgbClr val="8B2C2C"/>
-                </a:solidFill>
-                <a:latin typeface="思源黑体"/>
-                <a:eastAsia typeface="思源黑体"/>
-                <a:cs typeface="思源黑体"/>
-                <a:ascii typeface="思源黑体"/>
-              </a:rPr>
-              <a:t>❓ </a:t>
-            </a:r>
-            <a:r>
-              <a:rPr sz="1100" b="0">
-                <a:solidFill>
-                  <a:srgbClr val="2C2C2C"/>
-                </a:solidFill>
-                <a:latin typeface="思源黑体"/>
-                <a:eastAsia typeface="思源黑体"/>
-                <a:cs typeface="思源黑体"/>
-                <a:ascii typeface="思源黑体"/>
-              </a:rPr>
-              <a:t>两次飞跃——第一次：毛泽东思想；第二次：中国特色社会主义理论体系</a:t>
             </a:r>
           </a:p>
         </p:txBody>

--- a/03-资源/PPT/毛泽东思想和中国特色社会主义理论体系概论 教学大纲概览.pptx
+++ b/03-资源/PPT/毛泽东思想和中国特色社会主义理论体系概论 教学大纲概览.pptx
@@ -50943,7 +50943,7 @@
                 <a:cs typeface="思源黑体"/>
                 <a:ascii typeface="思源黑体"/>
               </a:rPr>
-              <a:t>为什么同样学习马克思主义，苏联走通了而中国走出了完全不同的路？</a:t>
+              <a:t>为什么马克思主义来到中国后，会生长出真正属于中国自己的道路答案？</a:t>
             </a:r>
           </a:p>
         </p:txBody>
@@ -51331,7 +51331,7 @@
                 <a:cs typeface="思源黑体"/>
                 <a:ascii typeface="思源黑体"/>
               </a:rPr>
-              <a:t>为什么同样学习马克思主义，苏联走通了而中国走出了完全不同的路？</a:t>
+              <a:t>为什么马克思主义来到中国后，会生长出真正属于中国自己的道路答案？</a:t>
             </a:r>
           </a:p>
           <a:p>
@@ -51362,7 +51362,7 @@
                 <a:cs typeface="思源黑体"/>
                 <a:ascii typeface="思源黑体"/>
               </a:rPr>
-              <a:t>马克思主义中国化——1938 年毛泽东提出，2017 年十九大、2021 年六中全会升级为「中国化时代化」</a:t>
+              <a:t>马克思主义中国化——把马克思主义基本原理放到中国问题中，用中国实践回答中国道路、制度和发展难题。</a:t>
             </a:r>
           </a:p>
           <a:p>
@@ -51393,7 +51393,7 @@
                 <a:cs typeface="思源黑体"/>
                 <a:ascii typeface="思源黑体"/>
               </a:rPr>
-              <a:t>两个结合——马克思主义基本原理同中国具体实际相结合、同中华优秀传统文化相结合</a:t>
+              <a:t>两个结合——既同中国现实条件相结合，也同中华优秀传统文化相贯通，让理论扎根中国。</a:t>
             </a:r>
           </a:p>
         </p:txBody>
@@ -52112,7 +52112,7 @@
                 <a:cs typeface="思源黑体"/>
                 <a:ascii typeface="思源黑体"/>
               </a:rPr>
-              <a:t>1938 年毛泽东提出，2017 年十九大、2021 年六中全会升级为「中国化时代化」</a:t>
+              <a:t>把马克思主义基本原理放到中国问题中，用中国实践回答中国道路、制度和发展难题。</a:t>
             </a:r>
           </a:p>
         </p:txBody>
@@ -52361,7 +52361,7 @@
                 <a:cs typeface="思源黑体"/>
                 <a:ascii typeface="思源黑体"/>
               </a:rPr>
-              <a:t>马克思主义基本原理同中国具体实际相结合、同中华优秀传统文化相结合</a:t>
+              <a:t>既同中国现实条件相结合，也同中华优秀传统文化相贯通，让理论扎根中国。</a:t>
             </a:r>
           </a:p>
         </p:txBody>
@@ -52610,7 +52610,7 @@
                 <a:cs typeface="思源黑体"/>
                 <a:ascii typeface="思源黑体"/>
               </a:rPr>
-              <a:t>第一次：毛泽东思想；第二次：中国特色社会主义理论体系</a:t>
+              <a:t>指马克思主义中国化形成毛泽东思想，又形成中国特色社会主义理论体系的重大成果。</a:t>
             </a:r>
           </a:p>
         </p:txBody>
@@ -52859,7 +52859,7 @@
                 <a:cs typeface="思源黑体"/>
                 <a:ascii typeface="思源黑体"/>
               </a:rPr>
-              <a:t>理论成果之间既坚守根本又发展创新的关系</a:t>
+              <a:t>不同理论成果都坚持马克思主义立场方法，又随时代任务变化不断提出新观点。</a:t>
             </a:r>
           </a:p>
         </p:txBody>
@@ -53418,7 +53418,7 @@
                 <a:ascii typeface="思源黑体"/>
               </a:rPr>
               <a:t>案例：遵义会议（1935）
-讲授角度：说明马克思主义中国化不是照搬苏联/共产国际指示，而是在中国革命实践中形成独立自主的判断能力——是马克思主义中国化时代化的关键节点。</a:t>
+讲授角度：把自己放在长征途中：前有围追堵截，队伍急需判断方向。请学生思考，面对书本原则与现实困局，为什么必须从中国革命现场出发作选择，而不是只背现成答案。</a:t>
             </a:r>
           </a:p>
         </p:txBody>
@@ -53632,7 +53632,7 @@
                 <a:cs typeface="思源黑体"/>
                 <a:ascii typeface="思源黑体"/>
               </a:rPr>
-              <a:t>【辨析题】为什么说遵义会议是中国共产党从幼年走向成熟的重要标志？能否举出反例证明「照搬苏联」同样可行？</a:t>
+              <a:t>【应用题】如果你在长征队伍中参与路线讨论，会用哪些中国实际来检验理论选择？</a:t>
             </a:r>
           </a:p>
         </p:txBody>
